--- a/public/kurs/slides/REQ-bootcamp-uke01.pptx
+++ b/public/kurs/slides/REQ-bootcamp-uke01.pptx
@@ -525,7 +525,7 @@
           <a:lstStyle/>
           <a:p>
             <a:r>
-              <a:t>Kickoff. Herman + Nicolay. Rolig start - folk kommer inn med kaffe.</a:t>
+              <a:t/>
             </a:r>
           </a:p>
         </p:txBody>
@@ -595,7 +595,7 @@
           <a:lstStyle/>
           <a:p>
             <a:r>
-              <a:t>Pek tilbake på METR-kurven to slides bak - samme form, dette er REQ sin del av den. Uke 5 er vendepunktet: fra bruk til bygging. NB: Økt 8 heter foreløpig «Trygg bruk» - innholdet er under omlegging (mindre AI-sikkerhet, jf. REQ); fase 3 omdøpt til «Forankring og leveranse».</a:t>
+              <a:t/>
             </a:r>
           </a:p>
         </p:txBody>
@@ -665,7 +665,7 @@
           <a:lstStyle/>
           <a:p>
             <a:r>
-              <a:t>Samme kart som Clarksons-kurset, men med modellen som eget lag i bunn. Fortell nedenfra og opp: språkmodellen er motoren (modellvalg = neste slides). Flatene er der dere møter den i hverdagen - chat, Cowork, Claude Code. Skills, MCP og agenter er det dere selv bygger i fase 2, og plugins er måten dere pakker og deler det på - kursmateriellet ligger faktisk i sitt eget plugin. Poeng nr. 2: grunnmuren er modulær. MCP er en åpen standard, og skills/plugins-konseptene finnes hos alle leverandørene - bytter dere til GPT eller Gemini, beholder dere alt dere har bygget i lagene over. Det dere lærer er overførbart. Ikke gå i dybden - alt dette kommer igjen senere i kurset.</a:t>
+              <a:t/>
             </a:r>
           </a:p>
         </p:txBody>
@@ -735,7 +735,7 @@
           <a:lstStyle/>
           <a:p>
             <a:r>
-              <a:t>Fortell flyten venstre mot høyre: møter og tale fanges automatisk, alt samles i PI, og AI-verktøyene bygger på den konteksten. Demoen kommer rett etter denne sliden - vis PI med et ekte (ufarlig) prosjekt, Wispr Flow-diktering, Granola-notat. Maks 8 min. Målet er «sånn kan det se ut hos dere» - ikke produktdemo.</a:t>
+              <a:t/>
             </a:r>
           </a:p>
         </p:txBody>
@@ -805,7 +805,7 @@
           <a:lstStyle/>
           <a:p>
             <a:r>
-              <a:t>Vanligste misforståelse: å bruke Claude som Google eller som Bloomberg. Den er ingen av delene.</a:t>
+              <a:t/>
             </a:r>
           </a:p>
         </p:txBody>
@@ -875,7 +875,7 @@
           <a:lstStyle/>
           <a:p>
             <a:r>
-              <a:t>Kontekstvinduet = alt modellen ser i ETT kall, vist som fargede felt: systeminstruks, verktøy/MCP, prosjekt &amp; minne, hentet materiale, samtalehistorikk og din melding - så svaret ut. Poeng 1: det DU skriver er den minste biten; historikk + hentet materiale + prosjektkontekst fyller mest (bredden antyder typisk forbruk, ikke eksakt). Poeng 2: vinduet har fast token-budsjett (ledig plass til høyre) og bygges på nytt ved hvert kall - modellen husker ingenting mellom kall. Svaret teller også. Praktisk: legg fast kontekst i Projects, hold vinduet rent - billigere og bedre svar. Per ba eksplisitt om dette temaet.</a:t>
+              <a:t/>
             </a:r>
           </a:p>
         </p:txBody>
@@ -945,7 +945,7 @@
           <a:lstStyle/>
           <a:p>
             <a:r>
-              <a:t>Rask oversikt over hva en plugin kan inneholde - ikke gå i dybden. Kommandoer = snarveier du skriver selv. Skills = oppskrifter Claude velger selv. Sub-agenter = egne hjelpere for én oppgave. MCP = standardkobling til data og systemer. Hooks = automatikk på hendelser. Alt dette bygger dere selv fra fase 2 (uke 6–7). Neste slide viser en ekte plugin: kursets egen.</a:t>
+              <a:t/>
             </a:r>
           </a:p>
         </p:txBody>
@@ -1015,7 +1015,7 @@
           <a:lstStyle/>
           <a:p>
             <a:r>
-              <a:t>Kjernen i avansert Claude-bruk: skills = faste oppskrifter Claude tar i bruk selv, MCP = standardkobling mellom AI og data. Ikke gå i dybden - begge kommer igjen i uke 6–7. Selg øyeblikket: dere skal nå installere deres første plugin.</a:t>
+              <a:t/>
             </a:r>
           </a:p>
         </p:txBody>
@@ -1085,7 +1085,7 @@
           <a:lstStyle/>
           <a:p>
             <a:r>
-              <a:t>Nicolay tar Teams-deltakerne (Stockholm/Bergen). Ingen innlogging - serveren er åpen. Fungerer i Claude-appen og på claude.ai, med kurskontoen.</a:t>
+              <a:t/>
             </a:r>
           </a:p>
         </p:txBody>
@@ -1155,7 +1155,7 @@
           <a:lstStyle/>
           <a:p>
             <a:r>
-              <a:t>La folk prøve fritt i 5–10 min, vis så REQ-presentasjonen live som avslutning. «Forklar»-skillen og presentasjons-demoen forutsetter plugin-ticketene #37 og #38.</a:t>
+              <a:t/>
             </a:r>
           </a:p>
         </p:txBody>
@@ -1225,7 +1225,7 @@
           <a:lstStyle/>
           <a:p>
             <a:r>
-              <a:t>Sett standarden fra dag én: begeistring OG disiplin. Dette er ikke småskrift - det er metoden.</a:t>
+              <a:t/>
             </a:r>
           </a:p>
         </p:txBody>
@@ -1295,7 +1295,7 @@
           <a:lstStyle/>
           <a:p>
             <a:r>
-              <a:t>Sett tonen: dette er et byggekurs, ikke et foredragskurs - men i dag er unntaket.</a:t>
+              <a:t/>
             </a:r>
           </a:p>
         </p:txBody>
@@ -1365,7 +1365,7 @@
           <a:lstStyle/>
           <a:p>
             <a:r>
-              <a:t>Varden går rundt. Nicolay tar Teams-deltakerne (Stockholm/Bergen). Alt kursmateriell, maler og recaps bor her resten av kurset.</a:t>
+              <a:t/>
             </a:r>
           </a:p>
         </p:txBody>
@@ -1435,7 +1435,7 @@
           <a:lstStyle/>
           <a:p>
             <a:r>
-              <a:t>20 min. Ferdig-kriterium: et brukbart første svar + en mening om modellvalg.</a:t>
+              <a:t/>
             </a:r>
           </a:p>
         </p:txBody>
@@ -1505,7 +1505,7 @@
           <a:lstStyle/>
           <a:p>
             <a:r>
-              <a:t>2–3 deltakere deler. Navngi gjerne Stockholm/Bergen så hybride ikke blir tilskuere.</a:t>
+              <a:t/>
             </a:r>
           </a:p>
         </p:txBody>
@@ -1575,7 +1575,7 @@
           <a:lstStyle/>
           <a:p>
             <a:r>
-              <a:t>Dette er Hermans viktigste output fra uke 1: en use-case-liste å vurdere feasibility på.</a:t>
+              <a:t/>
             </a:r>
           </a:p>
         </p:txBody>
@@ -1645,7 +1645,7 @@
           <a:lstStyle/>
           <a:p>
             <a:r>
-              <a:t>Minn om: pulse-survey kommer rett etterpå (2 min).</a:t>
+              <a:t/>
             </a:r>
           </a:p>
         </p:txBody>
@@ -1715,7 +1715,7 @@
           <a:lstStyle/>
           <a:p>
             <a:r>
-              <a:t>Kort personlig intro av alle fire. Logoraden: bakgrunn fra NBIM, Rystad, Carnegie, Arkwright, Aviant, Comstruct, NTNU, MIT, Princeton og Berkeley.</a:t>
+              <a:t/>
             </a:r>
           </a:p>
         </p:txBody>
@@ -1785,7 +1785,7 @@
           <a:lstStyle/>
           <a:p>
             <a:r>
-              <a:t>Knappschaft nevnes ALDRI ved navn - kun «sykehusgruppe i Tyskland». Valora, Toluma og Tom Wilhelmsen Stiftelse kan navngis.</a:t>
+              <a:t/>
             </a:r>
           </a:p>
         </p:txBody>
@@ -1855,7 +1855,7 @@
           <a:lstStyle/>
           <a:p>
             <a:r>
-              <a:t>Målsetningen vår etter ti uker: deltakerne har full kontroll på Claude, Projects, MCP, plugins og skills, og kan bygge sine egne agenter. Alt dette tar dem et steg nærmere det vi kaller AI-native.</a:t>
+              <a:t/>
             </a:r>
           </a:p>
         </p:txBody>
@@ -1925,7 +1925,7 @@
           <a:lstStyle/>
           <a:p>
             <a:r>
-              <a:t>Motivasjonsslide - rolig, ikke selgende. Venstre kurve (METR): doblingstakt 196 dager 2019–26, men akselererer - ~131 dager siden 2023, ~89 dager siden 2024; frontier løser nå ~5 timers oppgaver. Høyre kurve (Epoch): big tech-capex ~400 mrd USD i 2025, guidet ~725 mrd i 2026. Fortell lagget: GW-datasentre tar 1–3,5 år å bygge (nett-kø opptil 5–7 år) - pengene fra 2024–26 blir compute først 2026–29. NVIDIA Vera Rubin gikk i produksjon juni 2026, volum først Q4. Altså: begge kurvene peker opp, og det som allerede er bestilt er ikke levert. Vi er tidlig.</a:t>
+              <a:t/>
             </a:r>
           </a:p>
         </p:txBody>
@@ -1995,7 +1995,7 @@
           <a:lstStyle/>
           <a:p>
             <a:r>
-              <a:t>Epoch Capabilities Index: hver prikk er en modell, fargelagt per aktør (OpenAI, Google, Anthropic, Meta, xAI). Poenget er ikke enkeltmodeller, men retningen - hele frontlinjen skyves oppover, kontinuerlig. Neste slide zoomer inn på Anthropic (Claude).</a:t>
+              <a:t/>
             </a:r>
           </a:p>
         </p:txBody>
@@ -2065,7 +2065,7 @@
           <a:lstStyle/>
           <a:p>
             <a:r>
-              <a:t>Samme indeks, filtrert til Anthropic. Claude-familien dere velger mellom i praksis: Haiku (rask og billig), Sonnet (dagligarbeid), Opus (tung analyse) - og nyere Fable. Tommelfingerregel: start med Sonnet, løft til Opus når oppgaven faktisk krever mer.</a:t>
+              <a:t/>
             </a:r>
           </a:p>
         </p:txBody>
@@ -2135,7 +2135,7 @@
           <a:lstStyle/>
           <a:p>
             <a:r>
-              <a:t>NBIM fortelles i førsteperson - Herman er ex-NBIM. Nyansen som ikke står på sliden: fondet lar også modellene lese PM-enes egen handelshistorikk tilbake til 1998 og gi bias-coaching («swing bigger»). Tangen til Stortinget: «Før tok det oss dager å få oversikt. Nå tar det 10 minutter.» 20%-produktivitetstallet er bevisst utelatt. Balyasny: egne research-agenter (sentralbanktaler, merger-arb, sektoranalyser); tallene er fra OpenAIs casestudie. Rolig og konkret - bevisene rett etter kurvene, poenget lander i statementet.</a:t>
+              <a:t/>
             </a:r>
           </a:p>
         </p:txBody>
